--- a/slides/session4_data_structures.pptx
+++ b/slides/session4_data_structures.pptx
@@ -5,23 +5,23 @@
     <p:sldMasterId id="2147483648" r:id="rId1"/>
   </p:sldMasterIdLst>
   <p:sldIdLst>
-    <p:sldId id="256" r:id="rId7"/>
-    <p:sldId id="257" r:id="rId8"/>
-    <p:sldId id="258" r:id="rId9"/>
-    <p:sldId id="259" r:id="rId10"/>
-    <p:sldId id="260" r:id="rId11"/>
-    <p:sldId id="261" r:id="rId12"/>
-    <p:sldId id="262" r:id="rId13"/>
-    <p:sldId id="263" r:id="rId14"/>
-    <p:sldId id="264" r:id="rId15"/>
-    <p:sldId id="265" r:id="rId16"/>
-    <p:sldId id="266" r:id="rId17"/>
-    <p:sldId id="267" r:id="rId18"/>
-    <p:sldId id="268" r:id="rId19"/>
-    <p:sldId id="269" r:id="rId20"/>
-    <p:sldId id="270" r:id="rId21"/>
+    <p:sldId id="256" r:id="rId2"/>
+    <p:sldId id="257" r:id="rId3"/>
+    <p:sldId id="258" r:id="rId4"/>
+    <p:sldId id="259" r:id="rId5"/>
+    <p:sldId id="260" r:id="rId6"/>
+    <p:sldId id="261" r:id="rId7"/>
+    <p:sldId id="262" r:id="rId8"/>
+    <p:sldId id="263" r:id="rId9"/>
+    <p:sldId id="264" r:id="rId10"/>
+    <p:sldId id="265" r:id="rId11"/>
+    <p:sldId id="266" r:id="rId12"/>
+    <p:sldId id="267" r:id="rId13"/>
+    <p:sldId id="268" r:id="rId14"/>
+    <p:sldId id="269" r:id="rId15"/>
+    <p:sldId id="270" r:id="rId16"/>
   </p:sldIdLst>
-  <p:sldSz cx="12188952" cy="6858000" type="screen4x3"/>
+  <p:sldSz cx="12188825" cy="6858000"/>
   <p:notesSz cx="6858000" cy="9144000"/>
   <p:defaultTextStyle>
     <a:defPPr>
@@ -118,6 +118,22 @@
       </a:defRPr>
     </a:lvl9pPr>
   </p:defaultTextStyle>
+  <p:extLst>
+    <p:ext uri="{EFAFB233-063F-42B5-8137-9DF3F51BA10A}">
+      <p15:sldGuideLst xmlns:p15="http://schemas.microsoft.com/office/powerpoint/2012/main">
+        <p15:guide id="1" orient="horz" pos="2160">
+          <p15:clr>
+            <a:srgbClr val="A4A3A4"/>
+          </p15:clr>
+        </p15:guide>
+        <p15:guide id="2" pos="2880">
+          <p15:clr>
+            <a:srgbClr val="A4A3A4"/>
+          </p15:clr>
+        </p15:guide>
+      </p15:sldGuideLst>
+    </p:ext>
+  </p:extLst>
 </p:presentation>
 </file>
 
@@ -159,10 +175,9 @@
           <a:lstStyle/>
           <a:p>
             <a:r>
-              <a:rPr lang="en-US" smtClean="0"/>
+              <a:rPr lang="en-US"/>
               <a:t>Click to edit Master title style</a:t>
             </a:r>
-            <a:endParaRPr lang="en-US"/>
           </a:p>
         </p:txBody>
       </p:sp>
@@ -278,10 +293,9 @@
           </a:lstStyle>
           <a:p>
             <a:r>
-              <a:rPr lang="en-US" smtClean="0"/>
+              <a:rPr lang="en-US"/>
               <a:t>Click to edit Master subtitle style</a:t>
             </a:r>
-            <a:endParaRPr lang="en-US"/>
           </a:p>
         </p:txBody>
       </p:sp>
@@ -302,7 +316,7 @@
           <a:p>
             <a:fld id="{5BCAD085-E8A6-8845-BD4E-CB4CCA059FC4}" type="datetimeFigureOut">
               <a:rPr lang="en-US" smtClean="0"/>
-              <a:t>1/27/13</a:t>
+              <a:t>5/6/2026</a:t>
             </a:fld>
             <a:endParaRPr lang="en-US"/>
           </a:p>
@@ -396,10 +410,9 @@
           <a:lstStyle/>
           <a:p>
             <a:r>
-              <a:rPr lang="en-US" smtClean="0"/>
+              <a:rPr lang="en-US"/>
               <a:t>Click to edit Master title style</a:t>
             </a:r>
-            <a:endParaRPr lang="en-US"/>
           </a:p>
         </p:txBody>
       </p:sp>
@@ -420,38 +433,37 @@
           <a:p>
             <a:pPr lvl="0"/>
             <a:r>
-              <a:rPr lang="en-US" smtClean="0"/>
+              <a:rPr lang="en-US"/>
               <a:t>Click to edit Master text styles</a:t>
             </a:r>
           </a:p>
           <a:p>
             <a:pPr lvl="1"/>
             <a:r>
-              <a:rPr lang="en-US" smtClean="0"/>
+              <a:rPr lang="en-US"/>
               <a:t>Second level</a:t>
             </a:r>
           </a:p>
           <a:p>
             <a:pPr lvl="2"/>
             <a:r>
-              <a:rPr lang="en-US" smtClean="0"/>
+              <a:rPr lang="en-US"/>
               <a:t>Third level</a:t>
             </a:r>
           </a:p>
           <a:p>
             <a:pPr lvl="3"/>
             <a:r>
-              <a:rPr lang="en-US" smtClean="0"/>
+              <a:rPr lang="en-US"/>
               <a:t>Fourth level</a:t>
             </a:r>
           </a:p>
           <a:p>
             <a:pPr lvl="4"/>
             <a:r>
-              <a:rPr lang="en-US" smtClean="0"/>
+              <a:rPr lang="en-US"/>
               <a:t>Fifth level</a:t>
             </a:r>
-            <a:endParaRPr lang="en-US"/>
           </a:p>
         </p:txBody>
       </p:sp>
@@ -472,7 +484,7 @@
           <a:p>
             <a:fld id="{5BCAD085-E8A6-8845-BD4E-CB4CCA059FC4}" type="datetimeFigureOut">
               <a:rPr lang="en-US" smtClean="0"/>
-              <a:t>1/27/13</a:t>
+              <a:t>5/6/2026</a:t>
             </a:fld>
             <a:endParaRPr lang="en-US"/>
           </a:p>
@@ -571,10 +583,9 @@
           <a:lstStyle/>
           <a:p>
             <a:r>
-              <a:rPr lang="en-US" smtClean="0"/>
+              <a:rPr lang="en-US"/>
               <a:t>Click to edit Master title style</a:t>
             </a:r>
-            <a:endParaRPr lang="en-US"/>
           </a:p>
         </p:txBody>
       </p:sp>
@@ -600,38 +611,37 @@
           <a:p>
             <a:pPr lvl="0"/>
             <a:r>
-              <a:rPr lang="en-US" smtClean="0"/>
+              <a:rPr lang="en-US"/>
               <a:t>Click to edit Master text styles</a:t>
             </a:r>
           </a:p>
           <a:p>
             <a:pPr lvl="1"/>
             <a:r>
-              <a:rPr lang="en-US" smtClean="0"/>
+              <a:rPr lang="en-US"/>
               <a:t>Second level</a:t>
             </a:r>
           </a:p>
           <a:p>
             <a:pPr lvl="2"/>
             <a:r>
-              <a:rPr lang="en-US" smtClean="0"/>
+              <a:rPr lang="en-US"/>
               <a:t>Third level</a:t>
             </a:r>
           </a:p>
           <a:p>
             <a:pPr lvl="3"/>
             <a:r>
-              <a:rPr lang="en-US" smtClean="0"/>
+              <a:rPr lang="en-US"/>
               <a:t>Fourth level</a:t>
             </a:r>
           </a:p>
           <a:p>
             <a:pPr lvl="4"/>
             <a:r>
-              <a:rPr lang="en-US" smtClean="0"/>
+              <a:rPr lang="en-US"/>
               <a:t>Fifth level</a:t>
             </a:r>
-            <a:endParaRPr lang="en-US"/>
           </a:p>
         </p:txBody>
       </p:sp>
@@ -652,7 +662,7 @@
           <a:p>
             <a:fld id="{5BCAD085-E8A6-8845-BD4E-CB4CCA059FC4}" type="datetimeFigureOut">
               <a:rPr lang="en-US" smtClean="0"/>
-              <a:t>1/27/13</a:t>
+              <a:t>5/6/2026</a:t>
             </a:fld>
             <a:endParaRPr lang="en-US"/>
           </a:p>
@@ -746,10 +756,9 @@
           <a:lstStyle/>
           <a:p>
             <a:r>
-              <a:rPr lang="en-US" smtClean="0"/>
+              <a:rPr lang="en-US"/>
               <a:t>Click to edit Master title style</a:t>
             </a:r>
-            <a:endParaRPr lang="en-US"/>
           </a:p>
         </p:txBody>
       </p:sp>
@@ -770,38 +779,37 @@
           <a:p>
             <a:pPr lvl="0"/>
             <a:r>
-              <a:rPr lang="en-US" smtClean="0"/>
+              <a:rPr lang="en-US"/>
               <a:t>Click to edit Master text styles</a:t>
             </a:r>
           </a:p>
           <a:p>
             <a:pPr lvl="1"/>
             <a:r>
-              <a:rPr lang="en-US" smtClean="0"/>
+              <a:rPr lang="en-US"/>
               <a:t>Second level</a:t>
             </a:r>
           </a:p>
           <a:p>
             <a:pPr lvl="2"/>
             <a:r>
-              <a:rPr lang="en-US" smtClean="0"/>
+              <a:rPr lang="en-US"/>
               <a:t>Third level</a:t>
             </a:r>
           </a:p>
           <a:p>
             <a:pPr lvl="3"/>
             <a:r>
-              <a:rPr lang="en-US" smtClean="0"/>
+              <a:rPr lang="en-US"/>
               <a:t>Fourth level</a:t>
             </a:r>
           </a:p>
           <a:p>
             <a:pPr lvl="4"/>
             <a:r>
-              <a:rPr lang="en-US" smtClean="0"/>
+              <a:rPr lang="en-US"/>
               <a:t>Fifth level</a:t>
             </a:r>
-            <a:endParaRPr lang="en-US"/>
           </a:p>
         </p:txBody>
       </p:sp>
@@ -822,7 +830,7 @@
           <a:p>
             <a:fld id="{5BCAD085-E8A6-8845-BD4E-CB4CCA059FC4}" type="datetimeFigureOut">
               <a:rPr lang="en-US" smtClean="0"/>
-              <a:t>1/27/13</a:t>
+              <a:t>5/6/2026</a:t>
             </a:fld>
             <a:endParaRPr lang="en-US"/>
           </a:p>
@@ -925,10 +933,9 @@
           </a:lstStyle>
           <a:p>
             <a:r>
-              <a:rPr lang="en-US" smtClean="0"/>
+              <a:rPr lang="en-US"/>
               <a:t>Click to edit Master title style</a:t>
             </a:r>
-            <a:endParaRPr lang="en-US"/>
           </a:p>
         </p:txBody>
       </p:sp>
@@ -1045,7 +1052,7 @@
           <a:p>
             <a:pPr lvl="0"/>
             <a:r>
-              <a:rPr lang="en-US" smtClean="0"/>
+              <a:rPr lang="en-US"/>
               <a:t>Click to edit Master text styles</a:t>
             </a:r>
           </a:p>
@@ -1068,7 +1075,7 @@
           <a:p>
             <a:fld id="{5BCAD085-E8A6-8845-BD4E-CB4CCA059FC4}" type="datetimeFigureOut">
               <a:rPr lang="en-US" smtClean="0"/>
-              <a:t>1/27/13</a:t>
+              <a:t>5/6/2026</a:t>
             </a:fld>
             <a:endParaRPr lang="en-US"/>
           </a:p>
@@ -1162,10 +1169,9 @@
           <a:lstStyle/>
           <a:p>
             <a:r>
-              <a:rPr lang="en-US" smtClean="0"/>
+              <a:rPr lang="en-US"/>
               <a:t>Click to edit Master title style</a:t>
             </a:r>
-            <a:endParaRPr lang="en-US"/>
           </a:p>
         </p:txBody>
       </p:sp>
@@ -1219,38 +1225,37 @@
           <a:p>
             <a:pPr lvl="0"/>
             <a:r>
-              <a:rPr lang="en-US" smtClean="0"/>
+              <a:rPr lang="en-US"/>
               <a:t>Click to edit Master text styles</a:t>
             </a:r>
           </a:p>
           <a:p>
             <a:pPr lvl="1"/>
             <a:r>
-              <a:rPr lang="en-US" smtClean="0"/>
+              <a:rPr lang="en-US"/>
               <a:t>Second level</a:t>
             </a:r>
           </a:p>
           <a:p>
             <a:pPr lvl="2"/>
             <a:r>
-              <a:rPr lang="en-US" smtClean="0"/>
+              <a:rPr lang="en-US"/>
               <a:t>Third level</a:t>
             </a:r>
           </a:p>
           <a:p>
             <a:pPr lvl="3"/>
             <a:r>
-              <a:rPr lang="en-US" smtClean="0"/>
+              <a:rPr lang="en-US"/>
               <a:t>Fourth level</a:t>
             </a:r>
           </a:p>
           <a:p>
             <a:pPr lvl="4"/>
             <a:r>
-              <a:rPr lang="en-US" smtClean="0"/>
+              <a:rPr lang="en-US"/>
               <a:t>Fifth level</a:t>
             </a:r>
-            <a:endParaRPr lang="en-US"/>
           </a:p>
         </p:txBody>
       </p:sp>
@@ -1304,38 +1309,37 @@
           <a:p>
             <a:pPr lvl="0"/>
             <a:r>
-              <a:rPr lang="en-US" smtClean="0"/>
+              <a:rPr lang="en-US"/>
               <a:t>Click to edit Master text styles</a:t>
             </a:r>
           </a:p>
           <a:p>
             <a:pPr lvl="1"/>
             <a:r>
-              <a:rPr lang="en-US" smtClean="0"/>
+              <a:rPr lang="en-US"/>
               <a:t>Second level</a:t>
             </a:r>
           </a:p>
           <a:p>
             <a:pPr lvl="2"/>
             <a:r>
-              <a:rPr lang="en-US" smtClean="0"/>
+              <a:rPr lang="en-US"/>
               <a:t>Third level</a:t>
             </a:r>
           </a:p>
           <a:p>
             <a:pPr lvl="3"/>
             <a:r>
-              <a:rPr lang="en-US" smtClean="0"/>
+              <a:rPr lang="en-US"/>
               <a:t>Fourth level</a:t>
             </a:r>
           </a:p>
           <a:p>
             <a:pPr lvl="4"/>
             <a:r>
-              <a:rPr lang="en-US" smtClean="0"/>
+              <a:rPr lang="en-US"/>
               <a:t>Fifth level</a:t>
             </a:r>
-            <a:endParaRPr lang="en-US"/>
           </a:p>
         </p:txBody>
       </p:sp>
@@ -1356,7 +1360,7 @@
           <a:p>
             <a:fld id="{5BCAD085-E8A6-8845-BD4E-CB4CCA059FC4}" type="datetimeFigureOut">
               <a:rPr lang="en-US" smtClean="0"/>
-              <a:t>1/27/13</a:t>
+              <a:t>5/6/2026</a:t>
             </a:fld>
             <a:endParaRPr lang="en-US"/>
           </a:p>
@@ -1454,10 +1458,9 @@
           </a:lstStyle>
           <a:p>
             <a:r>
-              <a:rPr lang="en-US" smtClean="0"/>
+              <a:rPr lang="en-US"/>
               <a:t>Click to edit Master title style</a:t>
             </a:r>
-            <a:endParaRPr lang="en-US"/>
           </a:p>
         </p:txBody>
       </p:sp>
@@ -1520,7 +1523,7 @@
           <a:p>
             <a:pPr lvl="0"/>
             <a:r>
-              <a:rPr lang="en-US" smtClean="0"/>
+              <a:rPr lang="en-US"/>
               <a:t>Click to edit Master text styles</a:t>
             </a:r>
           </a:p>
@@ -1576,38 +1579,37 @@
           <a:p>
             <a:pPr lvl="0"/>
             <a:r>
-              <a:rPr lang="en-US" smtClean="0"/>
+              <a:rPr lang="en-US"/>
               <a:t>Click to edit Master text styles</a:t>
             </a:r>
           </a:p>
           <a:p>
             <a:pPr lvl="1"/>
             <a:r>
-              <a:rPr lang="en-US" smtClean="0"/>
+              <a:rPr lang="en-US"/>
               <a:t>Second level</a:t>
             </a:r>
           </a:p>
           <a:p>
             <a:pPr lvl="2"/>
             <a:r>
-              <a:rPr lang="en-US" smtClean="0"/>
+              <a:rPr lang="en-US"/>
               <a:t>Third level</a:t>
             </a:r>
           </a:p>
           <a:p>
             <a:pPr lvl="3"/>
             <a:r>
-              <a:rPr lang="en-US" smtClean="0"/>
+              <a:rPr lang="en-US"/>
               <a:t>Fourth level</a:t>
             </a:r>
           </a:p>
           <a:p>
             <a:pPr lvl="4"/>
             <a:r>
-              <a:rPr lang="en-US" smtClean="0"/>
+              <a:rPr lang="en-US"/>
               <a:t>Fifth level</a:t>
             </a:r>
-            <a:endParaRPr lang="en-US"/>
           </a:p>
         </p:txBody>
       </p:sp>
@@ -1670,7 +1672,7 @@
           <a:p>
             <a:pPr lvl="0"/>
             <a:r>
-              <a:rPr lang="en-US" smtClean="0"/>
+              <a:rPr lang="en-US"/>
               <a:t>Click to edit Master text styles</a:t>
             </a:r>
           </a:p>
@@ -1726,38 +1728,37 @@
           <a:p>
             <a:pPr lvl="0"/>
             <a:r>
-              <a:rPr lang="en-US" smtClean="0"/>
+              <a:rPr lang="en-US"/>
               <a:t>Click to edit Master text styles</a:t>
             </a:r>
           </a:p>
           <a:p>
             <a:pPr lvl="1"/>
             <a:r>
-              <a:rPr lang="en-US" smtClean="0"/>
+              <a:rPr lang="en-US"/>
               <a:t>Second level</a:t>
             </a:r>
           </a:p>
           <a:p>
             <a:pPr lvl="2"/>
             <a:r>
-              <a:rPr lang="en-US" smtClean="0"/>
+              <a:rPr lang="en-US"/>
               <a:t>Third level</a:t>
             </a:r>
           </a:p>
           <a:p>
             <a:pPr lvl="3"/>
             <a:r>
-              <a:rPr lang="en-US" smtClean="0"/>
+              <a:rPr lang="en-US"/>
               <a:t>Fourth level</a:t>
             </a:r>
           </a:p>
           <a:p>
             <a:pPr lvl="4"/>
             <a:r>
-              <a:rPr lang="en-US" smtClean="0"/>
+              <a:rPr lang="en-US"/>
               <a:t>Fifth level</a:t>
             </a:r>
-            <a:endParaRPr lang="en-US"/>
           </a:p>
         </p:txBody>
       </p:sp>
@@ -1778,7 +1779,7 @@
           <a:p>
             <a:fld id="{5BCAD085-E8A6-8845-BD4E-CB4CCA059FC4}" type="datetimeFigureOut">
               <a:rPr lang="en-US" smtClean="0"/>
-              <a:t>1/27/13</a:t>
+              <a:t>5/6/2026</a:t>
             </a:fld>
             <a:endParaRPr lang="en-US"/>
           </a:p>
@@ -1872,10 +1873,9 @@
           <a:lstStyle/>
           <a:p>
             <a:r>
-              <a:rPr lang="en-US" smtClean="0"/>
+              <a:rPr lang="en-US"/>
               <a:t>Click to edit Master title style</a:t>
             </a:r>
-            <a:endParaRPr lang="en-US"/>
           </a:p>
         </p:txBody>
       </p:sp>
@@ -1896,7 +1896,7 @@
           <a:p>
             <a:fld id="{5BCAD085-E8A6-8845-BD4E-CB4CCA059FC4}" type="datetimeFigureOut">
               <a:rPr lang="en-US" smtClean="0"/>
-              <a:t>1/27/13</a:t>
+              <a:t>5/6/2026</a:t>
             </a:fld>
             <a:endParaRPr lang="en-US"/>
           </a:p>
@@ -1991,7 +1991,7 @@
           <a:p>
             <a:fld id="{5BCAD085-E8A6-8845-BD4E-CB4CCA059FC4}" type="datetimeFigureOut">
               <a:rPr lang="en-US" smtClean="0"/>
-              <a:t>1/27/13</a:t>
+              <a:t>5/6/2026</a:t>
             </a:fld>
             <a:endParaRPr lang="en-US"/>
           </a:p>
@@ -2094,10 +2094,9 @@
           </a:lstStyle>
           <a:p>
             <a:r>
-              <a:rPr lang="en-US" smtClean="0"/>
+              <a:rPr lang="en-US"/>
               <a:t>Click to edit Master title style</a:t>
             </a:r>
-            <a:endParaRPr lang="en-US"/>
           </a:p>
         </p:txBody>
       </p:sp>
@@ -2151,38 +2150,37 @@
           <a:p>
             <a:pPr lvl="0"/>
             <a:r>
-              <a:rPr lang="en-US" smtClean="0"/>
+              <a:rPr lang="en-US"/>
               <a:t>Click to edit Master text styles</a:t>
             </a:r>
           </a:p>
           <a:p>
             <a:pPr lvl="1"/>
             <a:r>
-              <a:rPr lang="en-US" smtClean="0"/>
+              <a:rPr lang="en-US"/>
               <a:t>Second level</a:t>
             </a:r>
           </a:p>
           <a:p>
             <a:pPr lvl="2"/>
             <a:r>
-              <a:rPr lang="en-US" smtClean="0"/>
+              <a:rPr lang="en-US"/>
               <a:t>Third level</a:t>
             </a:r>
           </a:p>
           <a:p>
             <a:pPr lvl="3"/>
             <a:r>
-              <a:rPr lang="en-US" smtClean="0"/>
+              <a:rPr lang="en-US"/>
               <a:t>Fourth level</a:t>
             </a:r>
           </a:p>
           <a:p>
             <a:pPr lvl="4"/>
             <a:r>
-              <a:rPr lang="en-US" smtClean="0"/>
+              <a:rPr lang="en-US"/>
               <a:t>Fifth level</a:t>
             </a:r>
-            <a:endParaRPr lang="en-US"/>
           </a:p>
         </p:txBody>
       </p:sp>
@@ -2245,7 +2243,7 @@
           <a:p>
             <a:pPr lvl="0"/>
             <a:r>
-              <a:rPr lang="en-US" smtClean="0"/>
+              <a:rPr lang="en-US"/>
               <a:t>Click to edit Master text styles</a:t>
             </a:r>
           </a:p>
@@ -2268,7 +2266,7 @@
           <a:p>
             <a:fld id="{5BCAD085-E8A6-8845-BD4E-CB4CCA059FC4}" type="datetimeFigureOut">
               <a:rPr lang="en-US" smtClean="0"/>
-              <a:t>1/27/13</a:t>
+              <a:t>5/6/2026</a:t>
             </a:fld>
             <a:endParaRPr lang="en-US"/>
           </a:p>
@@ -2371,10 +2369,9 @@
           </a:lstStyle>
           <a:p>
             <a:r>
-              <a:rPr lang="en-US" smtClean="0"/>
+              <a:rPr lang="en-US"/>
               <a:t>Click to edit Master title style</a:t>
             </a:r>
-            <a:endParaRPr lang="en-US"/>
           </a:p>
         </p:txBody>
       </p:sp>
@@ -2498,7 +2495,7 @@
           <a:p>
             <a:pPr lvl="0"/>
             <a:r>
-              <a:rPr lang="en-US" smtClean="0"/>
+              <a:rPr lang="en-US"/>
               <a:t>Click to edit Master text styles</a:t>
             </a:r>
           </a:p>
@@ -2521,7 +2518,7 @@
           <a:p>
             <a:fld id="{5BCAD085-E8A6-8845-BD4E-CB4CCA059FC4}" type="datetimeFigureOut">
               <a:rPr lang="en-US" smtClean="0"/>
-              <a:t>1/27/13</a:t>
+              <a:t>5/6/2026</a:t>
             </a:fld>
             <a:endParaRPr lang="en-US"/>
           </a:p>
@@ -2630,10 +2627,9 @@
           <a:lstStyle/>
           <a:p>
             <a:r>
-              <a:rPr lang="en-US" smtClean="0"/>
+              <a:rPr lang="en-US"/>
               <a:t>Click to edit Master title style</a:t>
             </a:r>
-            <a:endParaRPr lang="en-US"/>
           </a:p>
         </p:txBody>
       </p:sp>
@@ -2664,38 +2660,37 @@
           <a:p>
             <a:pPr lvl="0"/>
             <a:r>
-              <a:rPr lang="en-US" smtClean="0"/>
+              <a:rPr lang="en-US"/>
               <a:t>Click to edit Master text styles</a:t>
             </a:r>
           </a:p>
           <a:p>
             <a:pPr lvl="1"/>
             <a:r>
-              <a:rPr lang="en-US" smtClean="0"/>
+              <a:rPr lang="en-US"/>
               <a:t>Second level</a:t>
             </a:r>
           </a:p>
           <a:p>
             <a:pPr lvl="2"/>
             <a:r>
-              <a:rPr lang="en-US" smtClean="0"/>
+              <a:rPr lang="en-US"/>
               <a:t>Third level</a:t>
             </a:r>
           </a:p>
           <a:p>
             <a:pPr lvl="3"/>
             <a:r>
-              <a:rPr lang="en-US" smtClean="0"/>
+              <a:rPr lang="en-US"/>
               <a:t>Fourth level</a:t>
             </a:r>
           </a:p>
           <a:p>
             <a:pPr lvl="4"/>
             <a:r>
-              <a:rPr lang="en-US" smtClean="0"/>
+              <a:rPr lang="en-US"/>
               <a:t>Fifth level</a:t>
             </a:r>
-            <a:endParaRPr lang="en-US"/>
           </a:p>
         </p:txBody>
       </p:sp>
@@ -2734,7 +2729,7 @@
           <a:p>
             <a:fld id="{5BCAD085-E8A6-8845-BD4E-CB4CCA059FC4}" type="datetimeFigureOut">
               <a:rPr lang="en-US" smtClean="0"/>
-              <a:t>1/27/13</a:t>
+              <a:t>5/6/2026</a:t>
             </a:fld>
             <a:endParaRPr lang="en-US"/>
           </a:p>
@@ -3093,7 +3088,7 @@
 </file>
 
 <file path=ppt/slides/slide1.xml><?xml version="1.0" encoding="utf-8"?>
-<p:sld xmlns:a="http://schemas.openxmlformats.org/drawingml/2006/main" xmlns:p="http://schemas.openxmlformats.org/presentationml/2006/main" xmlns:r="http://schemas.openxmlformats.org/officeDocument/2006/relationships">
+<p:sld xmlns:a="http://schemas.openxmlformats.org/drawingml/2006/main" xmlns:r="http://schemas.openxmlformats.org/officeDocument/2006/relationships" xmlns:p="http://schemas.openxmlformats.org/presentationml/2006/main">
   <p:cSld>
     <p:bg>
       <p:bgPr>
@@ -3109,7 +3104,14 @@
         <p:cNvGrpSpPr/>
         <p:nvPr/>
       </p:nvGrpSpPr>
-      <p:grpSpPr/>
+      <p:grpSpPr>
+        <a:xfrm>
+          <a:off x="0" y="0"/>
+          <a:ext cx="0" cy="0"/>
+          <a:chOff x="0" y="0"/>
+          <a:chExt cx="0" cy="0"/>
+        </a:xfrm>
+      </p:grpSpPr>
       <p:sp>
         <p:nvSpPr>
           <p:cNvPr id="2" name="Rectangle 1"/>
@@ -3150,6 +3152,7 @@
           <a:lstStyle/>
           <a:p>
             <a:pPr algn="ctr"/>
+            <a:endParaRPr/>
           </a:p>
         </p:txBody>
       </p:sp>
@@ -3196,7 +3199,7 @@
         <p:spPr>
           <a:xfrm>
             <a:off x="914400" y="2651760"/>
-            <a:ext cx="10360152" cy="731520"/>
+            <a:ext cx="10360152" cy="492443"/>
           </a:xfrm>
           <a:prstGeom prst="rect">
             <a:avLst/>
@@ -3216,7 +3219,23 @@
                   <a:srgbClr val="BFD7F5"/>
                 </a:solidFill>
               </a:rPr>
-              <a:t>Session 4: Lists, Tuples &amp; Dictionaries</a:t>
+              <a:t>Session </a:t>
+            </a:r>
+            <a:r>
+              <a:rPr lang="en-US" sz="2600" b="0" i="0">
+                <a:solidFill>
+                  <a:srgbClr val="BFD7F5"/>
+                </a:solidFill>
+              </a:rPr>
+              <a:t>3</a:t>
+            </a:r>
+            <a:r>
+              <a:rPr sz="2600" b="0" i="0">
+                <a:solidFill>
+                  <a:srgbClr val="BFD7F5"/>
+                </a:solidFill>
+              </a:rPr>
+              <a:t>: Lists, Tuples &amp; Dictionaries</a:t>
             </a:r>
           </a:p>
         </p:txBody>
@@ -3261,6 +3280,7 @@
           <a:lstStyle/>
           <a:p>
             <a:pPr algn="ctr"/>
+            <a:endParaRPr/>
           </a:p>
         </p:txBody>
       </p:sp>
@@ -3307,7 +3327,7 @@
 </file>
 
 <file path=ppt/slides/slide10.xml><?xml version="1.0" encoding="utf-8"?>
-<p:sld xmlns:a="http://schemas.openxmlformats.org/drawingml/2006/main" xmlns:p="http://schemas.openxmlformats.org/presentationml/2006/main" xmlns:r="http://schemas.openxmlformats.org/officeDocument/2006/relationships">
+<p:sld xmlns:a="http://schemas.openxmlformats.org/drawingml/2006/main" xmlns:r="http://schemas.openxmlformats.org/officeDocument/2006/relationships" xmlns:p="http://schemas.openxmlformats.org/presentationml/2006/main">
   <p:cSld>
     <p:bg>
       <p:bgPr>
@@ -3323,7 +3343,14 @@
         <p:cNvGrpSpPr/>
         <p:nvPr/>
       </p:nvGrpSpPr>
-      <p:grpSpPr/>
+      <p:grpSpPr>
+        <a:xfrm>
+          <a:off x="0" y="0"/>
+          <a:ext cx="0" cy="0"/>
+          <a:chOff x="0" y="0"/>
+          <a:chExt cx="0" cy="0"/>
+        </a:xfrm>
+      </p:grpSpPr>
       <p:sp>
         <p:nvSpPr>
           <p:cNvPr id="2" name="Rectangle 1"/>
@@ -3360,7 +3387,7 @@
           </a:fontRef>
         </p:style>
         <p:txBody>
-          <a:bodyPr rtlCol="0" anchor="ctr" wrap="square"/>
+          <a:bodyPr wrap="square" rtlCol="0" anchor="ctr"/>
           <a:lstStyle/>
           <a:p>
             <a:pPr algn="ctr"/>
@@ -3413,7 +3440,7 @@
           </a:fontRef>
         </p:style>
         <p:txBody>
-          <a:bodyPr rtlCol="0" anchor="ctr" wrap="none"/>
+          <a:bodyPr wrap="none" rtlCol="0" anchor="ctr"/>
           <a:lstStyle/>
           <a:p>
             <a:pPr algn="ctr"/>
@@ -3647,7 +3674,7 @@
 </file>
 
 <file path=ppt/slides/slide11.xml><?xml version="1.0" encoding="utf-8"?>
-<p:sld xmlns:a="http://schemas.openxmlformats.org/drawingml/2006/main" xmlns:p="http://schemas.openxmlformats.org/presentationml/2006/main" xmlns:r="http://schemas.openxmlformats.org/officeDocument/2006/relationships">
+<p:sld xmlns:a="http://schemas.openxmlformats.org/drawingml/2006/main" xmlns:r="http://schemas.openxmlformats.org/officeDocument/2006/relationships" xmlns:p="http://schemas.openxmlformats.org/presentationml/2006/main">
   <p:cSld>
     <p:bg>
       <p:bgPr>
@@ -3663,7 +3690,14 @@
         <p:cNvGrpSpPr/>
         <p:nvPr/>
       </p:nvGrpSpPr>
-      <p:grpSpPr/>
+      <p:grpSpPr>
+        <a:xfrm>
+          <a:off x="0" y="0"/>
+          <a:ext cx="0" cy="0"/>
+          <a:chOff x="0" y="0"/>
+          <a:chExt cx="0" cy="0"/>
+        </a:xfrm>
+      </p:grpSpPr>
       <p:sp>
         <p:nvSpPr>
           <p:cNvPr id="2" name="Rectangle 1"/>
@@ -3700,7 +3734,7 @@
           </a:fontRef>
         </p:style>
         <p:txBody>
-          <a:bodyPr rtlCol="0" anchor="ctr" wrap="square"/>
+          <a:bodyPr wrap="square" rtlCol="0" anchor="ctr"/>
           <a:lstStyle/>
           <a:p>
             <a:pPr algn="ctr"/>
@@ -3753,7 +3787,7 @@
           </a:fontRef>
         </p:style>
         <p:txBody>
-          <a:bodyPr rtlCol="0" anchor="ctr" wrap="none"/>
+          <a:bodyPr wrap="none" rtlCol="0" anchor="ctr"/>
           <a:lstStyle/>
           <a:p>
             <a:pPr algn="ctr"/>
@@ -3954,7 +3988,7 @@
 </file>
 
 <file path=ppt/slides/slide12.xml><?xml version="1.0" encoding="utf-8"?>
-<p:sld xmlns:a="http://schemas.openxmlformats.org/drawingml/2006/main" xmlns:p="http://schemas.openxmlformats.org/presentationml/2006/main" xmlns:r="http://schemas.openxmlformats.org/officeDocument/2006/relationships">
+<p:sld xmlns:a="http://schemas.openxmlformats.org/drawingml/2006/main" xmlns:r="http://schemas.openxmlformats.org/officeDocument/2006/relationships" xmlns:p="http://schemas.openxmlformats.org/presentationml/2006/main">
   <p:cSld>
     <p:bg>
       <p:bgPr>
@@ -3970,7 +4004,14 @@
         <p:cNvGrpSpPr/>
         <p:nvPr/>
       </p:nvGrpSpPr>
-      <p:grpSpPr/>
+      <p:grpSpPr>
+        <a:xfrm>
+          <a:off x="0" y="0"/>
+          <a:ext cx="0" cy="0"/>
+          <a:chOff x="0" y="0"/>
+          <a:chExt cx="0" cy="0"/>
+        </a:xfrm>
+      </p:grpSpPr>
       <p:sp>
         <p:nvSpPr>
           <p:cNvPr id="2" name="Rectangle 1"/>
@@ -4007,7 +4048,7 @@
           </a:fontRef>
         </p:style>
         <p:txBody>
-          <a:bodyPr rtlCol="0" anchor="ctr" wrap="square"/>
+          <a:bodyPr wrap="square" rtlCol="0" anchor="ctr"/>
           <a:lstStyle/>
           <a:p>
             <a:pPr algn="ctr"/>
@@ -4094,7 +4135,7 @@
           </a:fontRef>
         </p:style>
         <p:txBody>
-          <a:bodyPr rtlCol="0" anchor="ctr" wrap="none"/>
+          <a:bodyPr wrap="none" rtlCol="0" anchor="ctr"/>
           <a:lstStyle/>
           <a:p>
             <a:pPr algn="ctr"/>
@@ -4339,7 +4380,7 @@
 </file>
 
 <file path=ppt/slides/slide13.xml><?xml version="1.0" encoding="utf-8"?>
-<p:sld xmlns:a="http://schemas.openxmlformats.org/drawingml/2006/main" xmlns:p="http://schemas.openxmlformats.org/presentationml/2006/main" xmlns:r="http://schemas.openxmlformats.org/officeDocument/2006/relationships">
+<p:sld xmlns:a="http://schemas.openxmlformats.org/drawingml/2006/main" xmlns:r="http://schemas.openxmlformats.org/officeDocument/2006/relationships" xmlns:p="http://schemas.openxmlformats.org/presentationml/2006/main">
   <p:cSld>
     <p:bg>
       <p:bgPr>
@@ -4355,7 +4396,14 @@
         <p:cNvGrpSpPr/>
         <p:nvPr/>
       </p:nvGrpSpPr>
-      <p:grpSpPr/>
+      <p:grpSpPr>
+        <a:xfrm>
+          <a:off x="0" y="0"/>
+          <a:ext cx="0" cy="0"/>
+          <a:chOff x="0" y="0"/>
+          <a:chExt cx="0" cy="0"/>
+        </a:xfrm>
+      </p:grpSpPr>
       <p:sp>
         <p:nvSpPr>
           <p:cNvPr id="2" name="Rectangle 1"/>
@@ -4392,7 +4440,7 @@
           </a:fontRef>
         </p:style>
         <p:txBody>
-          <a:bodyPr rtlCol="0" anchor="ctr" wrap="square"/>
+          <a:bodyPr wrap="square" rtlCol="0" anchor="ctr"/>
           <a:lstStyle/>
           <a:p>
             <a:pPr algn="ctr"/>
@@ -4751,7 +4799,7 @@
 </file>
 
 <file path=ppt/slides/slide14.xml><?xml version="1.0" encoding="utf-8"?>
-<p:sld xmlns:a="http://schemas.openxmlformats.org/drawingml/2006/main" xmlns:p="http://schemas.openxmlformats.org/presentationml/2006/main" xmlns:r="http://schemas.openxmlformats.org/officeDocument/2006/relationships">
+<p:sld xmlns:a="http://schemas.openxmlformats.org/drawingml/2006/main" xmlns:r="http://schemas.openxmlformats.org/officeDocument/2006/relationships" xmlns:p="http://schemas.openxmlformats.org/presentationml/2006/main">
   <p:cSld>
     <p:bg>
       <p:bgPr>
@@ -4767,7 +4815,14 @@
         <p:cNvGrpSpPr/>
         <p:nvPr/>
       </p:nvGrpSpPr>
-      <p:grpSpPr/>
+      <p:grpSpPr>
+        <a:xfrm>
+          <a:off x="0" y="0"/>
+          <a:ext cx="0" cy="0"/>
+          <a:chOff x="0" y="0"/>
+          <a:chExt cx="0" cy="0"/>
+        </a:xfrm>
+      </p:grpSpPr>
       <p:sp>
         <p:nvSpPr>
           <p:cNvPr id="2" name="Rectangle 1"/>
@@ -4804,7 +4859,7 @@
           </a:fontRef>
         </p:style>
         <p:txBody>
-          <a:bodyPr rtlCol="0" anchor="ctr" wrap="square"/>
+          <a:bodyPr wrap="square" rtlCol="0" anchor="ctr"/>
           <a:lstStyle/>
           <a:p>
             <a:pPr algn="ctr"/>
@@ -5124,7 +5179,7 @@
 </file>
 
 <file path=ppt/slides/slide15.xml><?xml version="1.0" encoding="utf-8"?>
-<p:sld xmlns:a="http://schemas.openxmlformats.org/drawingml/2006/main" xmlns:p="http://schemas.openxmlformats.org/presentationml/2006/main" xmlns:r="http://schemas.openxmlformats.org/officeDocument/2006/relationships">
+<p:sld xmlns:a="http://schemas.openxmlformats.org/drawingml/2006/main" xmlns:r="http://schemas.openxmlformats.org/officeDocument/2006/relationships" xmlns:p="http://schemas.openxmlformats.org/presentationml/2006/main">
   <p:cSld>
     <p:bg>
       <p:bgPr>
@@ -5140,7 +5195,14 @@
         <p:cNvGrpSpPr/>
         <p:nvPr/>
       </p:nvGrpSpPr>
-      <p:grpSpPr/>
+      <p:grpSpPr>
+        <a:xfrm>
+          <a:off x="0" y="0"/>
+          <a:ext cx="0" cy="0"/>
+          <a:chOff x="0" y="0"/>
+          <a:chExt cx="0" cy="0"/>
+        </a:xfrm>
+      </p:grpSpPr>
       <p:sp>
         <p:nvSpPr>
           <p:cNvPr id="2" name="Rectangle 1"/>
@@ -5177,7 +5239,7 @@
           </a:fontRef>
         </p:style>
         <p:txBody>
-          <a:bodyPr rtlCol="0" anchor="ctr" wrap="square"/>
+          <a:bodyPr wrap="square" rtlCol="0" anchor="ctr"/>
           <a:lstStyle/>
           <a:p>
             <a:pPr algn="ctr"/>
@@ -5328,7 +5390,7 @@
 </file>
 
 <file path=ppt/slides/slide2.xml><?xml version="1.0" encoding="utf-8"?>
-<p:sld xmlns:a="http://schemas.openxmlformats.org/drawingml/2006/main" xmlns:p="http://schemas.openxmlformats.org/presentationml/2006/main" xmlns:r="http://schemas.openxmlformats.org/officeDocument/2006/relationships">
+<p:sld xmlns:a="http://schemas.openxmlformats.org/drawingml/2006/main" xmlns:r="http://schemas.openxmlformats.org/officeDocument/2006/relationships" xmlns:p="http://schemas.openxmlformats.org/presentationml/2006/main">
   <p:cSld>
     <p:bg>
       <p:bgPr>
@@ -5344,7 +5406,14 @@
         <p:cNvGrpSpPr/>
         <p:nvPr/>
       </p:nvGrpSpPr>
-      <p:grpSpPr/>
+      <p:grpSpPr>
+        <a:xfrm>
+          <a:off x="0" y="0"/>
+          <a:ext cx="0" cy="0"/>
+          <a:chOff x="0" y="0"/>
+          <a:chExt cx="0" cy="0"/>
+        </a:xfrm>
+      </p:grpSpPr>
       <p:sp>
         <p:nvSpPr>
           <p:cNvPr id="2" name="Rectangle 1"/>
@@ -5381,7 +5450,7 @@
           </a:fontRef>
         </p:style>
         <p:txBody>
-          <a:bodyPr rtlCol="0" anchor="ctr" wrap="square"/>
+          <a:bodyPr wrap="square" rtlCol="0" anchor="ctr"/>
           <a:lstStyle/>
           <a:p>
             <a:pPr algn="ctr"/>
@@ -5508,7 +5577,7 @@
 </file>
 
 <file path=ppt/slides/slide3.xml><?xml version="1.0" encoding="utf-8"?>
-<p:sld xmlns:a="http://schemas.openxmlformats.org/drawingml/2006/main" xmlns:p="http://schemas.openxmlformats.org/presentationml/2006/main" xmlns:r="http://schemas.openxmlformats.org/officeDocument/2006/relationships">
+<p:sld xmlns:a="http://schemas.openxmlformats.org/drawingml/2006/main" xmlns:r="http://schemas.openxmlformats.org/officeDocument/2006/relationships" xmlns:p="http://schemas.openxmlformats.org/presentationml/2006/main">
   <p:cSld>
     <p:bg>
       <p:bgPr>
@@ -5524,7 +5593,14 @@
         <p:cNvGrpSpPr/>
         <p:nvPr/>
       </p:nvGrpSpPr>
-      <p:grpSpPr/>
+      <p:grpSpPr>
+        <a:xfrm>
+          <a:off x="0" y="0"/>
+          <a:ext cx="0" cy="0"/>
+          <a:chOff x="0" y="0"/>
+          <a:chExt cx="0" cy="0"/>
+        </a:xfrm>
+      </p:grpSpPr>
       <p:sp>
         <p:nvSpPr>
           <p:cNvPr id="2" name="Rectangle 1"/>
@@ -5561,7 +5637,7 @@
           </a:fontRef>
         </p:style>
         <p:txBody>
-          <a:bodyPr rtlCol="0" anchor="ctr" wrap="square"/>
+          <a:bodyPr wrap="square" rtlCol="0" anchor="ctr"/>
           <a:lstStyle/>
           <a:p>
             <a:pPr algn="ctr"/>
@@ -5648,7 +5724,7 @@
           </a:fontRef>
         </p:style>
         <p:txBody>
-          <a:bodyPr rtlCol="0" anchor="ctr" wrap="none"/>
+          <a:bodyPr wrap="none" rtlCol="0" anchor="ctr"/>
           <a:lstStyle/>
           <a:p>
             <a:pPr algn="ctr"/>
@@ -5805,7 +5881,7 @@
 </file>
 
 <file path=ppt/slides/slide4.xml><?xml version="1.0" encoding="utf-8"?>
-<p:sld xmlns:a="http://schemas.openxmlformats.org/drawingml/2006/main" xmlns:p="http://schemas.openxmlformats.org/presentationml/2006/main" xmlns:r="http://schemas.openxmlformats.org/officeDocument/2006/relationships">
+<p:sld xmlns:a="http://schemas.openxmlformats.org/drawingml/2006/main" xmlns:r="http://schemas.openxmlformats.org/officeDocument/2006/relationships" xmlns:p="http://schemas.openxmlformats.org/presentationml/2006/main">
   <p:cSld>
     <p:bg>
       <p:bgPr>
@@ -5821,7 +5897,14 @@
         <p:cNvGrpSpPr/>
         <p:nvPr/>
       </p:nvGrpSpPr>
-      <p:grpSpPr/>
+      <p:grpSpPr>
+        <a:xfrm>
+          <a:off x="0" y="0"/>
+          <a:ext cx="0" cy="0"/>
+          <a:chOff x="0" y="0"/>
+          <a:chExt cx="0" cy="0"/>
+        </a:xfrm>
+      </p:grpSpPr>
       <p:sp>
         <p:nvSpPr>
           <p:cNvPr id="2" name="Rectangle 1"/>
@@ -5858,7 +5941,7 @@
           </a:fontRef>
         </p:style>
         <p:txBody>
-          <a:bodyPr rtlCol="0" anchor="ctr" wrap="square"/>
+          <a:bodyPr wrap="square" rtlCol="0" anchor="ctr"/>
           <a:lstStyle/>
           <a:p>
             <a:pPr algn="ctr"/>
@@ -5945,7 +6028,7 @@
           </a:fontRef>
         </p:style>
         <p:txBody>
-          <a:bodyPr rtlCol="0" anchor="ctr" wrap="none"/>
+          <a:bodyPr wrap="none" rtlCol="0" anchor="ctr"/>
           <a:lstStyle/>
           <a:p>
             <a:pPr algn="ctr"/>
@@ -6113,7 +6196,7 @@
 </file>
 
 <file path=ppt/slides/slide5.xml><?xml version="1.0" encoding="utf-8"?>
-<p:sld xmlns:a="http://schemas.openxmlformats.org/drawingml/2006/main" xmlns:p="http://schemas.openxmlformats.org/presentationml/2006/main" xmlns:r="http://schemas.openxmlformats.org/officeDocument/2006/relationships">
+<p:sld xmlns:a="http://schemas.openxmlformats.org/drawingml/2006/main" xmlns:r="http://schemas.openxmlformats.org/officeDocument/2006/relationships" xmlns:p="http://schemas.openxmlformats.org/presentationml/2006/main">
   <p:cSld>
     <p:bg>
       <p:bgPr>
@@ -6129,7 +6212,14 @@
         <p:cNvGrpSpPr/>
         <p:nvPr/>
       </p:nvGrpSpPr>
-      <p:grpSpPr/>
+      <p:grpSpPr>
+        <a:xfrm>
+          <a:off x="0" y="0"/>
+          <a:ext cx="0" cy="0"/>
+          <a:chOff x="0" y="0"/>
+          <a:chExt cx="0" cy="0"/>
+        </a:xfrm>
+      </p:grpSpPr>
       <p:sp>
         <p:nvSpPr>
           <p:cNvPr id="2" name="Rectangle 1"/>
@@ -6166,7 +6256,7 @@
           </a:fontRef>
         </p:style>
         <p:txBody>
-          <a:bodyPr rtlCol="0" anchor="ctr" wrap="square"/>
+          <a:bodyPr wrap="square" rtlCol="0" anchor="ctr"/>
           <a:lstStyle/>
           <a:p>
             <a:pPr algn="ctr"/>
@@ -6219,7 +6309,7 @@
           </a:fontRef>
         </p:style>
         <p:txBody>
-          <a:bodyPr rtlCol="0" anchor="ctr" wrap="none"/>
+          <a:bodyPr wrap="none" rtlCol="0" anchor="ctr"/>
           <a:lstStyle/>
           <a:p>
             <a:pPr algn="ctr"/>
@@ -6409,7 +6499,7 @@
 </file>
 
 <file path=ppt/slides/slide6.xml><?xml version="1.0" encoding="utf-8"?>
-<p:sld xmlns:a="http://schemas.openxmlformats.org/drawingml/2006/main" xmlns:p="http://schemas.openxmlformats.org/presentationml/2006/main" xmlns:r="http://schemas.openxmlformats.org/officeDocument/2006/relationships">
+<p:sld xmlns:a="http://schemas.openxmlformats.org/drawingml/2006/main" xmlns:r="http://schemas.openxmlformats.org/officeDocument/2006/relationships" xmlns:p="http://schemas.openxmlformats.org/presentationml/2006/main">
   <p:cSld>
     <p:bg>
       <p:bgPr>
@@ -6425,7 +6515,14 @@
         <p:cNvGrpSpPr/>
         <p:nvPr/>
       </p:nvGrpSpPr>
-      <p:grpSpPr/>
+      <p:grpSpPr>
+        <a:xfrm>
+          <a:off x="0" y="0"/>
+          <a:ext cx="0" cy="0"/>
+          <a:chOff x="0" y="0"/>
+          <a:chExt cx="0" cy="0"/>
+        </a:xfrm>
+      </p:grpSpPr>
       <p:sp>
         <p:nvSpPr>
           <p:cNvPr id="2" name="Rectangle 1"/>
@@ -6462,7 +6559,7 @@
           </a:fontRef>
         </p:style>
         <p:txBody>
-          <a:bodyPr rtlCol="0" anchor="ctr" wrap="square"/>
+          <a:bodyPr wrap="square" rtlCol="0" anchor="ctr"/>
           <a:lstStyle/>
           <a:p>
             <a:pPr algn="ctr"/>
@@ -6515,7 +6612,7 @@
           </a:fontRef>
         </p:style>
         <p:txBody>
-          <a:bodyPr rtlCol="0" anchor="ctr" wrap="none"/>
+          <a:bodyPr wrap="none" rtlCol="0" anchor="ctr"/>
           <a:lstStyle/>
           <a:p>
             <a:pPr algn="ctr"/>
@@ -6727,7 +6824,7 @@
 </file>
 
 <file path=ppt/slides/slide7.xml><?xml version="1.0" encoding="utf-8"?>
-<p:sld xmlns:a="http://schemas.openxmlformats.org/drawingml/2006/main" xmlns:p="http://schemas.openxmlformats.org/presentationml/2006/main" xmlns:r="http://schemas.openxmlformats.org/officeDocument/2006/relationships">
+<p:sld xmlns:a="http://schemas.openxmlformats.org/drawingml/2006/main" xmlns:r="http://schemas.openxmlformats.org/officeDocument/2006/relationships" xmlns:p="http://schemas.openxmlformats.org/presentationml/2006/main">
   <p:cSld>
     <p:bg>
       <p:bgPr>
@@ -6743,7 +6840,14 @@
         <p:cNvGrpSpPr/>
         <p:nvPr/>
       </p:nvGrpSpPr>
-      <p:grpSpPr/>
+      <p:grpSpPr>
+        <a:xfrm>
+          <a:off x="0" y="0"/>
+          <a:ext cx="0" cy="0"/>
+          <a:chOff x="0" y="0"/>
+          <a:chExt cx="0" cy="0"/>
+        </a:xfrm>
+      </p:grpSpPr>
       <p:sp>
         <p:nvSpPr>
           <p:cNvPr id="2" name="Rectangle 1"/>
@@ -6780,7 +6884,7 @@
           </a:fontRef>
         </p:style>
         <p:txBody>
-          <a:bodyPr rtlCol="0" anchor="ctr" wrap="square"/>
+          <a:bodyPr wrap="square" rtlCol="0" anchor="ctr"/>
           <a:lstStyle/>
           <a:p>
             <a:pPr algn="ctr"/>
@@ -6833,7 +6937,7 @@
           </a:fontRef>
         </p:style>
         <p:txBody>
-          <a:bodyPr rtlCol="0" anchor="ctr" wrap="none"/>
+          <a:bodyPr wrap="none" rtlCol="0" anchor="ctr"/>
           <a:lstStyle/>
           <a:p>
             <a:pPr algn="ctr"/>
@@ -7045,7 +7149,7 @@
 </file>
 
 <file path=ppt/slides/slide8.xml><?xml version="1.0" encoding="utf-8"?>
-<p:sld xmlns:a="http://schemas.openxmlformats.org/drawingml/2006/main" xmlns:p="http://schemas.openxmlformats.org/presentationml/2006/main" xmlns:r="http://schemas.openxmlformats.org/officeDocument/2006/relationships">
+<p:sld xmlns:a="http://schemas.openxmlformats.org/drawingml/2006/main" xmlns:r="http://schemas.openxmlformats.org/officeDocument/2006/relationships" xmlns:p="http://schemas.openxmlformats.org/presentationml/2006/main">
   <p:cSld>
     <p:bg>
       <p:bgPr>
@@ -7061,7 +7165,14 @@
         <p:cNvGrpSpPr/>
         <p:nvPr/>
       </p:nvGrpSpPr>
-      <p:grpSpPr/>
+      <p:grpSpPr>
+        <a:xfrm>
+          <a:off x="0" y="0"/>
+          <a:ext cx="0" cy="0"/>
+          <a:chOff x="0" y="0"/>
+          <a:chExt cx="0" cy="0"/>
+        </a:xfrm>
+      </p:grpSpPr>
       <p:sp>
         <p:nvSpPr>
           <p:cNvPr id="2" name="Rectangle 1"/>
@@ -7098,7 +7209,7 @@
           </a:fontRef>
         </p:style>
         <p:txBody>
-          <a:bodyPr rtlCol="0" anchor="ctr" wrap="square"/>
+          <a:bodyPr wrap="square" rtlCol="0" anchor="ctr"/>
           <a:lstStyle/>
           <a:p>
             <a:pPr algn="ctr"/>
@@ -7185,7 +7296,7 @@
           </a:fontRef>
         </p:style>
         <p:txBody>
-          <a:bodyPr rtlCol="0" anchor="ctr" wrap="none"/>
+          <a:bodyPr wrap="none" rtlCol="0" anchor="ctr"/>
           <a:lstStyle/>
           <a:p>
             <a:pPr algn="ctr"/>
@@ -7386,7 +7497,7 @@
 </file>
 
 <file path=ppt/slides/slide9.xml><?xml version="1.0" encoding="utf-8"?>
-<p:sld xmlns:a="http://schemas.openxmlformats.org/drawingml/2006/main" xmlns:p="http://schemas.openxmlformats.org/presentationml/2006/main" xmlns:r="http://schemas.openxmlformats.org/officeDocument/2006/relationships">
+<p:sld xmlns:a="http://schemas.openxmlformats.org/drawingml/2006/main" xmlns:r="http://schemas.openxmlformats.org/officeDocument/2006/relationships" xmlns:p="http://schemas.openxmlformats.org/presentationml/2006/main">
   <p:cSld>
     <p:bg>
       <p:bgPr>
@@ -7402,7 +7513,14 @@
         <p:cNvGrpSpPr/>
         <p:nvPr/>
       </p:nvGrpSpPr>
-      <p:grpSpPr/>
+      <p:grpSpPr>
+        <a:xfrm>
+          <a:off x="0" y="0"/>
+          <a:ext cx="0" cy="0"/>
+          <a:chOff x="0" y="0"/>
+          <a:chExt cx="0" cy="0"/>
+        </a:xfrm>
+      </p:grpSpPr>
       <p:sp>
         <p:nvSpPr>
           <p:cNvPr id="2" name="Rectangle 1"/>
@@ -7439,7 +7557,7 @@
           </a:fontRef>
         </p:style>
         <p:txBody>
-          <a:bodyPr rtlCol="0" anchor="ctr" wrap="square"/>
+          <a:bodyPr wrap="square" rtlCol="0" anchor="ctr"/>
           <a:lstStyle/>
           <a:p>
             <a:pPr algn="ctr"/>
@@ -7526,7 +7644,7 @@
           </a:fontRef>
         </p:style>
         <p:txBody>
-          <a:bodyPr rtlCol="0" anchor="ctr" wrap="none"/>
+          <a:bodyPr wrap="none" rtlCol="0" anchor="ctr"/>
           <a:lstStyle/>
           <a:p>
             <a:pPr algn="ctr"/>
